--- a/assets/pptx/catalog-575.pptx
+++ b/assets/pptx/catalog-575.pptx
@@ -3252,7 +3252,7 @@
                 <a:ea typeface="Ebrima"/>
                 <a:cs typeface="Ebrima"/>
               </a:rPr>
-              <a:t>አዝ ወዳጄ ሆይ (ወዳጄ ሆይ) ምን እልሃለሁ (2x)</a:t>
+              <a:t>አዝ ወዳጄ ሆይ ወዳጄ ሆይ ምን እልሃለሁ 2x</a:t>
             </a:r>
           </a:p>
           <a:p>
@@ -3288,7 +3288,7 @@
                 <a:ea typeface="Ebrima"/>
                 <a:cs typeface="Ebrima"/>
               </a:rPr>
-              <a:t>የኔ ጌታ (የኔ ጌታ) ምን እልሃለሁ (2x)</a:t>
+              <a:t>የኔ ጌታ የኔ ጌታ ምን እልሃለሁ 2x</a:t>
             </a:r>
           </a:p>
           <a:p>
@@ -3458,7 +3458,7 @@
                 <a:ea typeface="Ebrima"/>
                 <a:cs typeface="Ebrima"/>
               </a:rPr>
-              <a:t>አዝ ታዳጊዬ (ታዳጊዬ) ምን እልሃለሁ (2x)</a:t>
+              <a:t>አዝ ታዳጊዬ ታዳጊዬ ምን እልሃለሁ 2x</a:t>
             </a:r>
           </a:p>
           <a:p>
@@ -3494,7 +3494,7 @@
                 <a:ea typeface="Ebrima"/>
                 <a:cs typeface="Ebrima"/>
               </a:rPr>
-              <a:t>የኔ ጌታ (የኔ ጌታ) ምን እልሃለሁ (2x)</a:t>
+              <a:t>የኔ ጌታ የኔ ጌታ ምን እልሃለሁ 2x</a:t>
             </a:r>
           </a:p>
           <a:p>
@@ -3579,7 +3579,7 @@
                 <a:ea typeface="Ebrima"/>
                 <a:cs typeface="Ebrima"/>
               </a:rPr>
-              <a:t>አዝ ወዳጄ ሆይ (ወዳጄ ሆይ) ምን እልሃለሁ (2x)</a:t>
+              <a:t>አዝ ወዳጄ ሆይ ወዳጄ ሆይ ምን እልሃለሁ 2x</a:t>
             </a:r>
           </a:p>
           <a:p>
@@ -3615,7 +3615,7 @@
                 <a:ea typeface="Ebrima"/>
                 <a:cs typeface="Ebrima"/>
               </a:rPr>
-              <a:t>የኔ ጌታ (የኔ ጌታ) ምን እልሃለሁ (2x)</a:t>
+              <a:t>የኔ ጌታ የኔ ጌታ ምን እልሃለሁ 2x</a:t>
             </a:r>
           </a:p>
           <a:p>
@@ -3700,7 +3700,7 @@
                 <a:ea typeface="Ebrima"/>
                 <a:cs typeface="Ebrima"/>
               </a:rPr>
-              <a:t>አዝ ወዳጄ ሆይ (ወዳጄ ሆይ) ምን እልሃለሁ (2x)</a:t>
+              <a:t>አዝ ወዳጄ ሆይ ወዳጄ ሆይ ምን እልሃለሁ 2x</a:t>
             </a:r>
           </a:p>
           <a:p>
@@ -3736,7 +3736,7 @@
                 <a:ea typeface="Ebrima"/>
                 <a:cs typeface="Ebrima"/>
               </a:rPr>
-              <a:t>የኔ ጌታ (የኔ ጌታ) ምን እልሃለሁ (2x)</a:t>
+              <a:t>የኔ ጌታ የኔ ጌታ ምን እልሃለሁ 2x</a:t>
             </a:r>
           </a:p>
           <a:p>
@@ -3924,7 +3924,7 @@
                 <a:ea typeface="Ebrima"/>
                 <a:cs typeface="Ebrima"/>
               </a:rPr>
-              <a:t>አዝ ወዳጄ ሆይ (ወዳጄ ሆይ) ምን እልሃለሁ (2x)</a:t>
+              <a:t>አዝ ወዳጄ ሆይ ወዳጄ ሆይ ምን እልሃለሁ 2x</a:t>
             </a:r>
           </a:p>
           <a:p>
@@ -3960,7 +3960,7 @@
                 <a:ea typeface="Ebrima"/>
                 <a:cs typeface="Ebrima"/>
               </a:rPr>
-              <a:t>የኔ ጌታ (የኔ ጌታ) ምን እልሃለሁ (2x)</a:t>
+              <a:t>የኔ ጌታ የኔ ጌታ ምን እልሃለሁ 2x</a:t>
             </a:r>
           </a:p>
           <a:p>
@@ -4130,7 +4130,7 @@
                 <a:ea typeface="Ebrima"/>
                 <a:cs typeface="Ebrima"/>
               </a:rPr>
-              <a:t>አዝ አባብዬ (አባብዬ) ምን እልሃለሁ ምን እልሃለሁ (2x)</a:t>
+              <a:t>አዝ አባብዬ አባብዬ ምን እልሃለሁ ምን እልሃለሁ 2x</a:t>
             </a:r>
           </a:p>
           <a:p>
@@ -4166,7 +4166,7 @@
                 <a:ea typeface="Ebrima"/>
                 <a:cs typeface="Ebrima"/>
               </a:rPr>
-              <a:t>የኔ ጌታ (የኔ ጌታ) ምን እልሃለሁ (2x)</a:t>
+              <a:t>የኔ ጌታ የኔ ጌታ ምን እልሃለሁ 2x</a:t>
             </a:r>
           </a:p>
           <a:p>
@@ -4336,7 +4336,7 @@
                 <a:ea typeface="Ebrima"/>
                 <a:cs typeface="Ebrima"/>
               </a:rPr>
-              <a:t>አዝ መከታዬ (መከታዬ) ምን እልሃለሁ ምን እልሃለሁ (2x)</a:t>
+              <a:t>አዝ መከታዬ መከታዬ ምን እልሃለሁ ምን እልሃለሁ 2x</a:t>
             </a:r>
           </a:p>
           <a:p>
@@ -4372,7 +4372,7 @@
                 <a:ea typeface="Ebrima"/>
                 <a:cs typeface="Ebrima"/>
               </a:rPr>
-              <a:t>የኔ ጌታ (የኔ ጌታ) ምን እልሃለሁ (2x)</a:t>
+              <a:t>የኔ ጌታ የኔ ጌታ ምን እልሃለሁ 2x</a:t>
             </a:r>
           </a:p>
           <a:p>
